--- a/lezioni/L08_script/slide.pptx
+++ b/lezioni/L08_script/slide.pptx
@@ -13,9 +13,10 @@
     <p:sldId id="261" r:id="rId7"/>
     <p:sldId id="262" r:id="rId8"/>
     <p:sldId id="263" r:id="rId9"/>
+    <p:sldId id="264" r:id="rId10"/>
   </p:sldIdLst>
   <p:notesMasterIdLst>
-    <p:notesMasterId r:id="rId10"/>
+    <p:notesMasterId r:id="rId11"/>
   </p:notesMasterIdLst>
   <p:sldSz cx="12192000" cy="6858000"/>
   <p:notesSz cx="6858000" cy="12192000"/>
@@ -114,13 +115,13 @@
   <p:extLst>
     <p:ext uri="{521415D9-36F7-43E2-AB2F-B90AF26B5E84}">
       <p14:sectionLst xmlns:p14="http://schemas.microsoft.com/office/powerpoint/2010/main">
-        <p14:section name="Apertura" id="{0571ce5a-5a1c-f49f-30ee-f0b0595be41f}">
+        <p14:section name="Apertura" id="{b04bb1c9-854f-9812-0062-13188c06d1d1}">
           <p14:sldIdLst>
             <p14:sldId id="256"/>
             <p14:sldId id="257"/>
           </p14:sldIdLst>
         </p14:section>
-        <p14:section name="Spiegazione" id="{973428c4-f68d-5c0f-c6f3-e8e6f83499e4}">
+        <p14:section name="Spiegazione" id="{25e1df78-9584-55ad-d25c-26b50b746804}">
           <p14:sldIdLst>
             <p14:sldId id="258"/>
             <p14:sldId id="259"/>
@@ -128,14 +129,19 @@
             <p14:sldId id="261"/>
           </p14:sldIdLst>
         </p14:section>
-        <p14:section name="Task" id="{78d40317-f7c5-dfd7-bf95-1bd5823c310c}">
+        <p14:section name="Task" id="{59985e86-291d-21aa-32f3-56bc41322695}">
           <p14:sldIdLst>
             <p14:sldId id="262"/>
           </p14:sldIdLst>
         </p14:section>
-        <p14:section name="Chiusura" id="{b55bb412-456d-4fa8-1662-42ea9a2a5846}">
+        <p14:section name="Mini-progetto" id="{a66aeefd-bd1e-4581-cea5-8770eefa4339}">
           <p14:sldIdLst>
             <p14:sldId id="263"/>
+          </p14:sldIdLst>
+        </p14:section>
+        <p14:section name="Chiusura" id="{525155a8-50f6-48ff-e9ce-f68fa465a477}">
+          <p14:sldIdLst>
+            <p14:sldId id="264"/>
           </p14:sldIdLst>
         </p14:section>
       </p14:sectionLst>
@@ -1158,7 +1164,7 @@
           <a:p>
             <a:r>
               <a:rPr lang="en-US" dirty="0"/>
-              <a:t/>
+              <a:t>Se i temi sono arrivati prima della lezione, durante il task passa nelle stanze a dire a ogni gruppo se la domanda è fattibile. Chi non l'ha mandato lo manda entro due giorni.</a:t>
             </a:r>
             <a:endParaRPr lang="en-US" dirty="0"/>
           </a:p>
@@ -1182,6 +1188,94 @@
             <a:fld id="{F7021451-1387-4CA6-816F-3879F97B5CBC}" type="slidenum">
               <a:rPr lang="en-US"/>
               <a:t>8</a:t>
+            </a:fld>
+            <a:endParaRPr lang="en-US"/>
+          </a:p>
+        </p:txBody>
+      </p:sp>
+    </p:spTree>
+    <p:extLst>
+      <p:ext uri="{BB962C8B-B14F-4D97-AF65-F5344CB8AC3E}">
+        <p14:creationId xmlns:p14="http://schemas.microsoft.com/office/powerpoint/2010/main" val="1024086991"/>
+      </p:ext>
+    </p:extLst>
+  </p:cSld>
+  <p:clrMapOvr>
+    <a:masterClrMapping/>
+  </p:clrMapOvr>
+</p:notes>
+</file>
+
+<file path=ppt/notesSlides/notesSlide9.xml><?xml version="1.0" encoding="utf-8"?>
+<p:notes xmlns:a="http://schemas.openxmlformats.org/drawingml/2006/main" xmlns:r="http://schemas.openxmlformats.org/officeDocument/2006/relationships" xmlns:p="http://schemas.openxmlformats.org/presentationml/2006/main">
+  <p:cSld>
+    <p:spTree>
+      <p:nvGrpSpPr>
+        <p:cNvPr id="1" name=""/>
+        <p:cNvGrpSpPr/>
+        <p:nvPr/>
+      </p:nvGrpSpPr>
+      <p:grpSpPr>
+        <a:xfrm>
+          <a:off x="0" y="0"/>
+          <a:ext cx="0" cy="0"/>
+          <a:chOff x="0" y="0"/>
+          <a:chExt cx="0" cy="0"/>
+        </a:xfrm>
+      </p:grpSpPr>
+      <p:sp>
+        <p:nvSpPr>
+          <p:cNvPr id="2" name="Slide Image Placeholder 1"/>
+          <p:cNvSpPr>
+            <a:spLocks noGrp="1" noRot="1" noChangeAspect="1"/>
+          </p:cNvSpPr>
+          <p:nvPr>
+            <p:ph type="sldImg"/>
+          </p:nvPr>
+        </p:nvSpPr>
+        <p:spPr/>
+      </p:sp>
+      <p:sp>
+        <p:nvSpPr>
+          <p:cNvPr id="3" name="Notes Placeholder 2"/>
+          <p:cNvSpPr>
+            <a:spLocks noGrp="1"/>
+          </p:cNvSpPr>
+          <p:nvPr>
+            <p:ph type="body" idx="1"/>
+          </p:nvPr>
+        </p:nvSpPr>
+        <p:spPr/>
+        <p:txBody>
+          <a:bodyPr/>
+          <a:lstStyle/>
+          <a:p>
+            <a:r>
+              <a:rPr lang="en-US" dirty="0"/>
+              <a:t/>
+            </a:r>
+            <a:endParaRPr lang="en-US" dirty="0"/>
+          </a:p>
+        </p:txBody>
+      </p:sp>
+      <p:sp>
+        <p:nvSpPr>
+          <p:cNvPr id="4" name="Slide Number Placeholder 3"/>
+          <p:cNvSpPr>
+            <a:spLocks noGrp="1"/>
+          </p:cNvSpPr>
+          <p:nvPr>
+            <p:ph type="sldNum" sz="quarter" idx="10"/>
+          </p:nvPr>
+        </p:nvSpPr>
+        <p:spPr/>
+        <p:txBody>
+          <a:bodyPr/>
+          <a:lstStyle/>
+          <a:p>
+            <a:fld id="{F7021451-1387-4CA6-816F-3879F97B5CBC}" type="slidenum">
+              <a:rPr lang="en-US"/>
+              <a:t>9</a:t>
             </a:fld>
             <a:endParaRPr lang="en-US"/>
           </a:p>
@@ -4873,6 +4967,702 @@
 <file path=ppt/slides/slide8.xml><?xml version="1.0" encoding="utf-8"?>
 <p:sld xmlns:a="http://schemas.openxmlformats.org/drawingml/2006/main" xmlns:r="http://schemas.openxmlformats.org/officeDocument/2006/relationships" xmlns:p="http://schemas.openxmlformats.org/presentationml/2006/main">
   <p:cSld name="Slide 8">
+    <p:spTree>
+      <p:nvGrpSpPr>
+        <p:cNvPr id="1" name=""/>
+        <p:cNvGrpSpPr/>
+        <p:nvPr/>
+      </p:nvGrpSpPr>
+      <p:grpSpPr>
+        <a:xfrm>
+          <a:off x="0" y="0"/>
+          <a:ext cx="0" cy="0"/>
+          <a:chOff x="0" y="0"/>
+          <a:chExt cx="0" cy="0"/>
+        </a:xfrm>
+      </p:grpSpPr>
+      <p:sp>
+        <p:nvSpPr>
+          <p:cNvPr id="2" name="Text 0"/>
+          <p:cNvSpPr/>
+          <p:nvPr>
+            <p:ph idx="100" type="title" hasCustomPrompt="1"/>
+          </p:nvPr>
+        </p:nvSpPr>
+        <p:spPr>
+          <a:xfrm>
+            <a:off x="548640" y="365760"/>
+            <a:ext cx="11064240" cy="822960"/>
+          </a:xfrm>
+          <a:prstGeom prst="rect">
+            <a:avLst/>
+          </a:prstGeom>
+          <a:noFill/>
+          <a:ln/>
+        </p:spPr>
+        <p:txBody>
+          <a:bodyPr wrap="square" lIns="0" tIns="0" rIns="0" bIns="0" rtlCol="0" anchor="ctr"/>
+          <a:lstStyle/>
+          <a:p>
+            <a:pPr algn="l" indent="0" marL="0">
+              <a:buNone/>
+            </a:pPr>
+            <a:r>
+              <a:rPr lang="en-US" sz="3600" b="1" dirty="0">
+                <a:solidFill>
+                  <a:srgbClr val="0F4C5C"/>
+                </a:solidFill>
+              </a:rPr>
+              <a:t>Il mini-progetto finale</a:t>
+            </a:r>
+            <a:endParaRPr lang="en-US" sz="3600" dirty="0"/>
+          </a:p>
+        </p:txBody>
+      </p:sp>
+      <p:sp>
+        <p:nvSpPr>
+          <p:cNvPr id="3" name="Shape 1"/>
+          <p:cNvSpPr/>
+          <p:nvPr/>
+        </p:nvSpPr>
+        <p:spPr>
+          <a:xfrm>
+            <a:off x="548640" y="1737360"/>
+            <a:ext cx="2560320" cy="2743200"/>
+          </a:xfrm>
+          <a:prstGeom prst="roundRect">
+            <a:avLst>
+              <a:gd name="adj" fmla="val 4286"/>
+            </a:avLst>
+          </a:prstGeom>
+          <a:solidFill>
+            <a:srgbClr val="EEF3F4"/>
+          </a:solidFill>
+          <a:ln/>
+        </p:spPr>
+      </p:sp>
+      <p:sp>
+        <p:nvSpPr>
+          <p:cNvPr id="4" name="Shape 2"/>
+          <p:cNvSpPr/>
+          <p:nvPr/>
+        </p:nvSpPr>
+        <p:spPr>
+          <a:xfrm>
+            <a:off x="822960" y="2011680"/>
+            <a:ext cx="914400" cy="914400"/>
+          </a:xfrm>
+          <a:prstGeom prst="ellipse">
+            <a:avLst/>
+          </a:prstGeom>
+          <a:solidFill>
+            <a:srgbClr val="FFFFFF"/>
+          </a:solidFill>
+          <a:ln/>
+        </p:spPr>
+      </p:sp>
+      <p:pic>
+        <p:nvPicPr>
+          <p:cNvPr id="5" name="Image 0" descr="preencoded.png">    </p:cNvPr>
+          <p:cNvPicPr>
+            <a:picLocks noChangeAspect="1"/>
+          </p:cNvPicPr>
+          <p:nvPr/>
+        </p:nvPicPr>
+        <p:blipFill>
+          <a:blip r:embed="rId1"/>
+          <a:stretch>
+            <a:fillRect/>
+          </a:stretch>
+        </p:blipFill>
+        <p:spPr>
+          <a:xfrm>
+            <a:off x="1069848" y="2258568"/>
+            <a:ext cx="420624" cy="420624"/>
+          </a:xfrm>
+          <a:prstGeom prst="rect">
+            <a:avLst/>
+          </a:prstGeom>
+        </p:spPr>
+      </p:pic>
+      <p:sp>
+        <p:nvSpPr>
+          <p:cNvPr id="6" name="Text 3"/>
+          <p:cNvSpPr txBox="1"/>
+          <p:nvPr/>
+        </p:nvSpPr>
+        <p:spPr>
+          <a:xfrm>
+            <a:off x="822960" y="3154680"/>
+            <a:ext cx="2011680" cy="502920"/>
+          </a:xfrm>
+          <a:prstGeom prst="rect">
+            <a:avLst/>
+          </a:prstGeom>
+          <a:noFill/>
+          <a:ln/>
+        </p:spPr>
+        <p:txBody>
+          <a:bodyPr wrap="square" lIns="0" tIns="0" rIns="0" bIns="0" rtlCol="0" anchor="ctr"/>
+          <a:lstStyle/>
+          <a:p>
+            <a:pPr indent="0" marL="0">
+              <a:buNone/>
+            </a:pPr>
+            <a:r>
+              <a:rPr lang="en-US" sz="2200" b="1" dirty="0">
+                <a:solidFill>
+                  <a:srgbClr val="1F2A30"/>
+                </a:solidFill>
+              </a:rPr>
+              <a:t>Una domanda</a:t>
+            </a:r>
+            <a:endParaRPr lang="en-US" sz="2200" dirty="0"/>
+          </a:p>
+        </p:txBody>
+      </p:sp>
+      <p:sp>
+        <p:nvSpPr>
+          <p:cNvPr id="7" name="Text 4"/>
+          <p:cNvSpPr txBox="1"/>
+          <p:nvPr/>
+        </p:nvSpPr>
+        <p:spPr>
+          <a:xfrm>
+            <a:off x="822960" y="3703320"/>
+            <a:ext cx="2011680" cy="594360"/>
+          </a:xfrm>
+          <a:prstGeom prst="rect">
+            <a:avLst/>
+          </a:prstGeom>
+          <a:noFill/>
+          <a:ln/>
+        </p:spPr>
+        <p:txBody>
+          <a:bodyPr wrap="square" lIns="0" tIns="0" rIns="0" bIns="0" rtlCol="0" anchor="t"/>
+          <a:lstStyle/>
+          <a:p>
+            <a:pPr indent="0" marL="0">
+              <a:buNone/>
+            </a:pPr>
+            <a:r>
+              <a:rPr lang="en-US" sz="1600" dirty="0">
+                <a:solidFill>
+                  <a:srgbClr val="5C6F7B"/>
+                </a:solidFill>
+              </a:rPr>
+              <a:t>piccola e precisa, con i dati che avete scelto</a:t>
+            </a:r>
+            <a:endParaRPr lang="en-US" sz="1600" dirty="0"/>
+          </a:p>
+        </p:txBody>
+      </p:sp>
+      <p:sp>
+        <p:nvSpPr>
+          <p:cNvPr id="8" name="Shape 5"/>
+          <p:cNvSpPr/>
+          <p:nvPr/>
+        </p:nvSpPr>
+        <p:spPr>
+          <a:xfrm>
+            <a:off x="3383280" y="1737360"/>
+            <a:ext cx="2560320" cy="2743200"/>
+          </a:xfrm>
+          <a:prstGeom prst="roundRect">
+            <a:avLst>
+              <a:gd name="adj" fmla="val 4286"/>
+            </a:avLst>
+          </a:prstGeom>
+          <a:solidFill>
+            <a:srgbClr val="EEF3F4"/>
+          </a:solidFill>
+          <a:ln/>
+        </p:spPr>
+      </p:sp>
+      <p:sp>
+        <p:nvSpPr>
+          <p:cNvPr id="9" name="Shape 6"/>
+          <p:cNvSpPr/>
+          <p:nvPr/>
+        </p:nvSpPr>
+        <p:spPr>
+          <a:xfrm>
+            <a:off x="3657600" y="2011680"/>
+            <a:ext cx="914400" cy="914400"/>
+          </a:xfrm>
+          <a:prstGeom prst="ellipse">
+            <a:avLst/>
+          </a:prstGeom>
+          <a:solidFill>
+            <a:srgbClr val="FFFFFF"/>
+          </a:solidFill>
+          <a:ln/>
+        </p:spPr>
+      </p:sp>
+      <p:pic>
+        <p:nvPicPr>
+          <p:cNvPr id="10" name="Image 1" descr="preencoded.png">    </p:cNvPr>
+          <p:cNvPicPr>
+            <a:picLocks noChangeAspect="1"/>
+          </p:cNvPicPr>
+          <p:nvPr/>
+        </p:nvPicPr>
+        <p:blipFill>
+          <a:blip r:embed="rId2"/>
+          <a:stretch>
+            <a:fillRect/>
+          </a:stretch>
+        </p:blipFill>
+        <p:spPr>
+          <a:xfrm>
+            <a:off x="3904488" y="2258568"/>
+            <a:ext cx="420624" cy="420624"/>
+          </a:xfrm>
+          <a:prstGeom prst="rect">
+            <a:avLst/>
+          </a:prstGeom>
+        </p:spPr>
+      </p:pic>
+      <p:sp>
+        <p:nvSpPr>
+          <p:cNvPr id="11" name="Text 7"/>
+          <p:cNvSpPr txBox="1"/>
+          <p:nvPr/>
+        </p:nvSpPr>
+        <p:spPr>
+          <a:xfrm>
+            <a:off x="3657600" y="3154680"/>
+            <a:ext cx="2011680" cy="502920"/>
+          </a:xfrm>
+          <a:prstGeom prst="rect">
+            <a:avLst/>
+          </a:prstGeom>
+          <a:noFill/>
+          <a:ln/>
+        </p:spPr>
+        <p:txBody>
+          <a:bodyPr wrap="square" lIns="0" tIns="0" rIns="0" bIns="0" rtlCol="0" anchor="ctr"/>
+          <a:lstStyle/>
+          <a:p>
+            <a:pPr indent="0" marL="0">
+              <a:buNone/>
+            </a:pPr>
+            <a:r>
+              <a:rPr lang="en-US" sz="2200" b="1" dirty="0">
+                <a:solidFill>
+                  <a:srgbClr val="1F2A30"/>
+                </a:solidFill>
+              </a:rPr>
+              <a:t>A casa, in 3</a:t>
+            </a:r>
+            <a:endParaRPr lang="en-US" sz="2200" dirty="0"/>
+          </a:p>
+        </p:txBody>
+      </p:sp>
+      <p:sp>
+        <p:nvSpPr>
+          <p:cNvPr id="12" name="Text 8"/>
+          <p:cNvSpPr txBox="1"/>
+          <p:nvPr/>
+        </p:nvSpPr>
+        <p:spPr>
+          <a:xfrm>
+            <a:off x="3657600" y="3703320"/>
+            <a:ext cx="2011680" cy="594360"/>
+          </a:xfrm>
+          <a:prstGeom prst="rect">
+            <a:avLst/>
+          </a:prstGeom>
+          <a:noFill/>
+          <a:ln/>
+        </p:spPr>
+        <p:txBody>
+          <a:bodyPr wrap="square" lIns="0" tIns="0" rIns="0" bIns="0" rtlCol="0" anchor="t"/>
+          <a:lstStyle/>
+          <a:p>
+            <a:pPr indent="0" marL="0">
+              <a:buNone/>
+            </a:pPr>
+            <a:r>
+              <a:rPr lang="en-US" sz="1600" dirty="0">
+                <a:solidFill>
+                  <a:srgbClr val="5C6F7B"/>
+                </a:solidFill>
+              </a:rPr>
+              <a:t>fino all'ultimo incontro, con uno sportello</a:t>
+            </a:r>
+            <a:endParaRPr lang="en-US" sz="1600" dirty="0"/>
+          </a:p>
+        </p:txBody>
+      </p:sp>
+      <p:sp>
+        <p:nvSpPr>
+          <p:cNvPr id="13" name="Shape 9"/>
+          <p:cNvSpPr/>
+          <p:nvPr/>
+        </p:nvSpPr>
+        <p:spPr>
+          <a:xfrm>
+            <a:off x="6217920" y="1737360"/>
+            <a:ext cx="2560320" cy="2743200"/>
+          </a:xfrm>
+          <a:prstGeom prst="roundRect">
+            <a:avLst>
+              <a:gd name="adj" fmla="val 4286"/>
+            </a:avLst>
+          </a:prstGeom>
+          <a:solidFill>
+            <a:srgbClr val="EEF3F4"/>
+          </a:solidFill>
+          <a:ln/>
+        </p:spPr>
+      </p:sp>
+      <p:sp>
+        <p:nvSpPr>
+          <p:cNvPr id="14" name="Shape 10"/>
+          <p:cNvSpPr/>
+          <p:nvPr/>
+        </p:nvSpPr>
+        <p:spPr>
+          <a:xfrm>
+            <a:off x="6492240" y="2011680"/>
+            <a:ext cx="914400" cy="914400"/>
+          </a:xfrm>
+          <a:prstGeom prst="ellipse">
+            <a:avLst/>
+          </a:prstGeom>
+          <a:solidFill>
+            <a:srgbClr val="FFFFFF"/>
+          </a:solidFill>
+          <a:ln/>
+        </p:spPr>
+      </p:sp>
+      <p:pic>
+        <p:nvPicPr>
+          <p:cNvPr id="15" name="Image 2" descr="preencoded.png">    </p:cNvPr>
+          <p:cNvPicPr>
+            <a:picLocks noChangeAspect="1"/>
+          </p:cNvPicPr>
+          <p:nvPr/>
+        </p:nvPicPr>
+        <p:blipFill>
+          <a:blip r:embed="rId3"/>
+          <a:stretch>
+            <a:fillRect/>
+          </a:stretch>
+        </p:blipFill>
+        <p:spPr>
+          <a:xfrm>
+            <a:off x="6739128" y="2258568"/>
+            <a:ext cx="420624" cy="420624"/>
+          </a:xfrm>
+          <a:prstGeom prst="rect">
+            <a:avLst/>
+          </a:prstGeom>
+        </p:spPr>
+      </p:pic>
+      <p:sp>
+        <p:nvSpPr>
+          <p:cNvPr id="16" name="Text 11"/>
+          <p:cNvSpPr txBox="1"/>
+          <p:nvPr/>
+        </p:nvSpPr>
+        <p:spPr>
+          <a:xfrm>
+            <a:off x="6492240" y="3154680"/>
+            <a:ext cx="2011680" cy="502920"/>
+          </a:xfrm>
+          <a:prstGeom prst="rect">
+            <a:avLst/>
+          </a:prstGeom>
+          <a:noFill/>
+          <a:ln/>
+        </p:spPr>
+        <p:txBody>
+          <a:bodyPr wrap="square" lIns="0" tIns="0" rIns="0" bIns="0" rtlCol="0" anchor="ctr"/>
+          <a:lstStyle/>
+          <a:p>
+            <a:pPr indent="0" marL="0">
+              <a:buNone/>
+            </a:pPr>
+            <a:r>
+              <a:rPr lang="en-US" sz="2200" b="1" dirty="0">
+                <a:solidFill>
+                  <a:srgbClr val="1F2A30"/>
+                </a:solidFill>
+              </a:rPr>
+              <a:t>Il notebook</a:t>
+            </a:r>
+            <a:endParaRPr lang="en-US" sz="2200" dirty="0"/>
+          </a:p>
+        </p:txBody>
+      </p:sp>
+      <p:sp>
+        <p:nvSpPr>
+          <p:cNvPr id="17" name="Text 12"/>
+          <p:cNvSpPr txBox="1"/>
+          <p:nvPr/>
+        </p:nvSpPr>
+        <p:spPr>
+          <a:xfrm>
+            <a:off x="6492240" y="3703320"/>
+            <a:ext cx="2011680" cy="594360"/>
+          </a:xfrm>
+          <a:prstGeom prst="rect">
+            <a:avLst/>
+          </a:prstGeom>
+          <a:noFill/>
+          <a:ln/>
+        </p:spPr>
+        <p:txBody>
+          <a:bodyPr wrap="square" lIns="0" tIns="0" rIns="0" bIns="0" rtlCol="0" anchor="t"/>
+          <a:lstStyle/>
+          <a:p>
+            <a:pPr indent="0" marL="0">
+              <a:buNone/>
+            </a:pPr>
+            <a:r>
+              <a:rPr lang="en-US" sz="1600" dirty="0">
+                <a:solidFill>
+                  <a:srgbClr val="5C6F7B"/>
+                </a:solidFill>
+              </a:rPr>
+              <a:t>e lo script, che girano da zero</a:t>
+            </a:r>
+            <a:endParaRPr lang="en-US" sz="1600" dirty="0"/>
+          </a:p>
+        </p:txBody>
+      </p:sp>
+      <p:sp>
+        <p:nvSpPr>
+          <p:cNvPr id="18" name="Shape 13"/>
+          <p:cNvSpPr/>
+          <p:nvPr/>
+        </p:nvSpPr>
+        <p:spPr>
+          <a:xfrm>
+            <a:off x="9052560" y="1737360"/>
+            <a:ext cx="2560320" cy="2743200"/>
+          </a:xfrm>
+          <a:prstGeom prst="roundRect">
+            <a:avLst>
+              <a:gd name="adj" fmla="val 4286"/>
+            </a:avLst>
+          </a:prstGeom>
+          <a:solidFill>
+            <a:srgbClr val="EEF3F4"/>
+          </a:solidFill>
+          <a:ln/>
+        </p:spPr>
+      </p:sp>
+      <p:sp>
+        <p:nvSpPr>
+          <p:cNvPr id="19" name="Shape 14"/>
+          <p:cNvSpPr/>
+          <p:nvPr/>
+        </p:nvSpPr>
+        <p:spPr>
+          <a:xfrm>
+            <a:off x="9326880" y="2011680"/>
+            <a:ext cx="914400" cy="914400"/>
+          </a:xfrm>
+          <a:prstGeom prst="ellipse">
+            <a:avLst/>
+          </a:prstGeom>
+          <a:solidFill>
+            <a:srgbClr val="FFFFFF"/>
+          </a:solidFill>
+          <a:ln/>
+        </p:spPr>
+      </p:sp>
+      <p:pic>
+        <p:nvPicPr>
+          <p:cNvPr id="20" name="Image 3" descr="preencoded.png">    </p:cNvPr>
+          <p:cNvPicPr>
+            <a:picLocks noChangeAspect="1"/>
+          </p:cNvPicPr>
+          <p:nvPr/>
+        </p:nvPicPr>
+        <p:blipFill>
+          <a:blip r:embed="rId4"/>
+          <a:stretch>
+            <a:fillRect/>
+          </a:stretch>
+        </p:blipFill>
+        <p:spPr>
+          <a:xfrm>
+            <a:off x="9573768" y="2258568"/>
+            <a:ext cx="420624" cy="420624"/>
+          </a:xfrm>
+          <a:prstGeom prst="rect">
+            <a:avLst/>
+          </a:prstGeom>
+        </p:spPr>
+      </p:pic>
+      <p:sp>
+        <p:nvSpPr>
+          <p:cNvPr id="21" name="Text 15"/>
+          <p:cNvSpPr txBox="1"/>
+          <p:nvPr/>
+        </p:nvSpPr>
+        <p:spPr>
+          <a:xfrm>
+            <a:off x="9326880" y="3154680"/>
+            <a:ext cx="2011680" cy="502920"/>
+          </a:xfrm>
+          <a:prstGeom prst="rect">
+            <a:avLst/>
+          </a:prstGeom>
+          <a:noFill/>
+          <a:ln/>
+        </p:spPr>
+        <p:txBody>
+          <a:bodyPr wrap="square" lIns="0" tIns="0" rIns="0" bIns="0" rtlCol="0" anchor="ctr"/>
+          <a:lstStyle/>
+          <a:p>
+            <a:pPr indent="0" marL="0">
+              <a:buNone/>
+            </a:pPr>
+            <a:r>
+              <a:rPr lang="en-US" sz="2200" b="1" dirty="0">
+                <a:solidFill>
+                  <a:srgbClr val="1F2A30"/>
+                </a:solidFill>
+              </a:rPr>
+              <a:t>10 minuti</a:t>
+            </a:r>
+            <a:endParaRPr lang="en-US" sz="2200" dirty="0"/>
+          </a:p>
+        </p:txBody>
+      </p:sp>
+      <p:sp>
+        <p:nvSpPr>
+          <p:cNvPr id="22" name="Text 16"/>
+          <p:cNvSpPr txBox="1"/>
+          <p:nvPr/>
+        </p:nvSpPr>
+        <p:spPr>
+          <a:xfrm>
+            <a:off x="9326880" y="3703320"/>
+            <a:ext cx="2011680" cy="594360"/>
+          </a:xfrm>
+          <a:prstGeom prst="rect">
+            <a:avLst/>
+          </a:prstGeom>
+          <a:noFill/>
+          <a:ln/>
+        </p:spPr>
+        <p:txBody>
+          <a:bodyPr wrap="square" lIns="0" tIns="0" rIns="0" bIns="0" rtlCol="0" anchor="t"/>
+          <a:lstStyle/>
+          <a:p>
+            <a:pPr indent="0" marL="0">
+              <a:buNone/>
+            </a:pPr>
+            <a:r>
+              <a:rPr lang="en-US" sz="1600" dirty="0">
+                <a:solidFill>
+                  <a:srgbClr val="5C6F7B"/>
+                </a:solidFill>
+              </a:rPr>
+              <a:t>e ognuno sa spiegare tutto</a:t>
+            </a:r>
+            <a:endParaRPr lang="en-US" sz="1600" dirty="0"/>
+          </a:p>
+        </p:txBody>
+      </p:sp>
+      <p:sp>
+        <p:nvSpPr>
+          <p:cNvPr id="23" name="Text 17"/>
+          <p:cNvSpPr txBox="1"/>
+          <p:nvPr/>
+        </p:nvSpPr>
+        <p:spPr>
+          <a:xfrm>
+            <a:off x="548640" y="4846320"/>
+            <a:ext cx="11064240" cy="457200"/>
+          </a:xfrm>
+          <a:prstGeom prst="rect">
+            <a:avLst/>
+          </a:prstGeom>
+          <a:noFill/>
+          <a:ln/>
+        </p:spPr>
+        <p:txBody>
+          <a:bodyPr wrap="square" lIns="0" tIns="0" rIns="0" bIns="0" rtlCol="0" anchor="ctr"/>
+          <a:lstStyle/>
+          <a:p>
+            <a:pPr indent="0" marL="0">
+              <a:buNone/>
+            </a:pPr>
+            <a:r>
+              <a:rPr lang="en-US" sz="1800" i="1" dirty="0">
+                <a:solidFill>
+                  <a:srgbClr val="0F4C5C"/>
+                </a:solidFill>
+              </a:rPr>
+              <a:t>Istruzioni, tappe e criteri: nel notebook dell'E4. Il giorno prima dell'ultimo incontro mandate il link.</a:t>
+            </a:r>
+            <a:endParaRPr lang="en-US" sz="1800" dirty="0"/>
+          </a:p>
+        </p:txBody>
+      </p:sp>
+      <p:sp>
+        <p:nvSpPr>
+          <p:cNvPr id="25" name="Slide Number Placeholder 0"/>
+          <p:cNvSpPr>
+            <a:spLocks noGrp="1"/>
+          </p:cNvSpPr>
+          <p:nvPr>
+            <p:ph type="sldNum" sz="quarter" idx="4294967295"/>
+          </p:nvPr>
+        </p:nvSpPr>
+        <p:spPr>
+          <a:xfrm>
+            <a:off x="11155680" y="6400800"/>
+            <a:ext cx="457200" cy="274320"/>
+          </a:xfrm>
+          <a:prstGeom prst="rect">
+            <a:avLst/>
+          </a:prstGeom>
+          <a:extLst>
+            <a:ext uri="{C572A759-6A51-4108-AA02-DFA0A04FC94B}">
+              <ma14:wrappingTextBoxFlag xmlns:ma14="http://schemas.microsoft.com/office/mac/drawingml/2011/main" val="0"/>
+            </a:ext>
+          </a:extLst>
+        </p:spPr>
+        <p:txBody>
+          <a:bodyPr/>
+          <a:lstStyle>
+            <a:lvl1pPr>
+              <a:defRPr sz="1000">
+                <a:solidFill>
+                  <a:srgbClr val="5C6F7B"/>
+                </a:solidFill>
+              </a:defRPr>
+            </a:lvl1pPr>
+          </a:lstStyle>
+          <a:p>
+            <a:pPr algn="r"/>
+            <a:fld id="{F7021451-1387-4CA6-816F-3879F97B5CBC}" type="slidenum">
+              <a:rPr b="0" lang="en-US"/>
+              <a:t>8</a:t>
+            </a:fld>
+            <a:endParaRPr lang="en-US"/>
+          </a:p>
+        </p:txBody>
+      </p:sp>
+    </p:spTree>
+  </p:cSld>
+  <p:clrMapOvr>
+    <a:masterClrMapping/>
+  </p:clrMapOvr>
+</p:sld>
+</file>
+
+<file path=ppt/slides/slide9.xml><?xml version="1.0" encoding="utf-8"?>
+<p:sld xmlns:a="http://schemas.openxmlformats.org/drawingml/2006/main" xmlns:r="http://schemas.openxmlformats.org/officeDocument/2006/relationships" xmlns:p="http://schemas.openxmlformats.org/presentationml/2006/main">
+  <p:cSld name="Slide 9">
     <p:spTree>
       <p:nvGrpSpPr>
         <p:cNvPr id="1" name=""/>
